--- a/doc-mk/Evaluation/qa2-latency-overhead-criteria.pptx
+++ b/doc-mk/Evaluation/qa2-latency-overhead-criteria.pptx
@@ -908,7 +908,7 @@
                 <a:ea typeface="Malgun Gothic" pitchFamily="34" charset="-122"/>
                 <a:cs typeface="Malgun Gothic" pitchFamily="34" charset="-120"/>
               </a:rPr>
-              <a:t>지연시간(고부하 Overhead) - 평가 기준</a:t>
+              <a:t>지연시간(고부하 악화 폭) - 평가 기준</a:t>
             </a:r>
             <a:endParaRPr lang="en-US" sz="3000" dirty="0"/>
           </a:p>
@@ -947,7 +947,7 @@
                 <a:ea typeface="Malgun Gothic" pitchFamily="34" charset="-122"/>
                 <a:cs typeface="Malgun Gothic" pitchFamily="34" charset="-120"/>
               </a:rPr>
-              <a:t>부하가 커질 때 지연시간(TTFT, TPOT 평균)이 늘어나는 폭이 Baseline보다 크지 않아야 함 (단, SLO를 넘으면 ★로 강등)</a:t>
+              <a:t>부하가 커질 때 지연시간(TTFT, TPOT 평균)이 일반 부하 대비 크게 늘지 않아야 함 (단, SLO를 넘으면 ★로 강등)</a:t>
             </a:r>
             <a:endParaRPr lang="en-US" sz="1400" dirty="0"/>
           </a:p>
@@ -1059,7 +1059,7 @@
                 <a:ea typeface="Malgun Gothic" pitchFamily="34" charset="-122"/>
                 <a:cs typeface="Malgun Gothic" pitchFamily="34" charset="-120"/>
               </a:rPr>
-              <a:t>[Metric] ΔT = T(고부하) − T(저부하)   (시스템별 자기 기준, TTFT·TPOT 평균)</a:t>
+              <a:t>[Metric] D = max [ (TTFT_고부하 − TTFT_일반) ÷ TTFT_일반 , (TPOT_고부하 − TPOT_일반) ÷ TPOT_일반 ]</a:t>
             </a:r>
             <a:endParaRPr lang="en-US" sz="1300" dirty="0"/>
           </a:p>
@@ -1068,7 +1068,7 @@
               <a:buNone/>
             </a:pPr>
             <a:r>
-              <a:rPr lang="en-US" sz="1300" b="1" dirty="0">
+              <a:rPr lang="en-US" sz="1300" dirty="0">
                 <a:solidFill>
                   <a:srgbClr val="2F5597"/>
                 </a:solidFill>
@@ -1076,7 +1076,7 @@
                 <a:ea typeface="Malgun Gothic" pitchFamily="34" charset="-122"/>
                 <a:cs typeface="Malgun Gothic" pitchFamily="34" charset="-120"/>
               </a:rPr>
-              <a:t>R = max [ ΔT_후보 ÷ ΔT_Baseline (TTFT) , ΔT_후보 ÷ ΔT_Baseline (TPOT) ]   (R ≤ 1이면 Baseline보다 덜 악화, 작을수록 overhead 적음)</a:t>
+              <a:t>평균 기준, 후보 자신의 일반 부하 대비 증가율. D = 0이면 부하가 커져도 지연 불변, 작을수록 고부하 overhead가 적음</a:t>
             </a:r>
             <a:endParaRPr lang="en-US" sz="1300" dirty="0"/>
           </a:p>
@@ -1470,7 +1470,7 @@
                           <a:ea typeface="Malgun Gothic" pitchFamily="34" charset="-122"/>
                           <a:cs typeface="Malgun Gothic" pitchFamily="34" charset="-120"/>
                         </a:rPr>
-                        <a:t>R ≤ 1.10 (악화 폭이 Baseline의 110% 이내) 그리고 SLO 충족</a:t>
+                        <a:t>D ≤ 10% 그리고 SLO 충족</a:t>
                       </a:r>
                       <a:endParaRPr lang="en-US" sz="1100" dirty="0">
                         <a:latin typeface="Malgun Gothic" charset="0"/>
@@ -1538,7 +1538,7 @@
                           <a:ea typeface="Malgun Gothic" pitchFamily="34" charset="-122"/>
                           <a:cs typeface="Malgun Gothic" pitchFamily="34" charset="-120"/>
                         </a:rPr>
-                        <a:t>고부하에서 후보가 더하는 지연 악화가 Baseline 수준 이내 = overhead가 부하에 의해 증폭되지 않음. seed ≥ 5의 기하평균으로 판정 [10%는 가정]</a:t>
+                        <a:t>고부하에서도 지연이 일반 부하 대비 10% 이내 = 메모리·이동 압박에서도 overhead가 거의 없음. seed ≥ 5의 기하평균으로 판정 [10%는 가정]</a:t>
                       </a:r>
                       <a:endParaRPr lang="en-US" sz="1100" dirty="0">
                         <a:latin typeface="Malgun Gothic" charset="0"/>
@@ -1606,7 +1606,7 @@
                           <a:ea typeface="Malgun Gothic" pitchFamily="34" charset="-122"/>
                           <a:cs typeface="Malgun Gothic" pitchFamily="34" charset="-120"/>
                         </a:rPr>
-                        <a:t>요구 시나리오(Baseline보다 크게 늘지 않아야 함) / 공통 QA 문서 §5</a:t>
+                        <a:t>요구 시나리오(일반 부하 대비 크게 늘지 않아야 함) / 공통 QA 문서 §5</a:t>
                       </a:r>
                       <a:endParaRPr lang="en-US" sz="1100" dirty="0">
                         <a:latin typeface="Malgun Gothic" charset="0"/>
@@ -1744,7 +1744,7 @@
                           <a:ea typeface="Malgun Gothic" pitchFamily="34" charset="-122"/>
                           <a:cs typeface="Malgun Gothic" pitchFamily="34" charset="-120"/>
                         </a:rPr>
-                        <a:t>1.10 &lt; R ≤ 1.30 그리고 SLO 충족</a:t>
+                        <a:t>10% &lt; D ≤ 30% 그리고 SLO 충족</a:t>
                       </a:r>
                       <a:endParaRPr lang="en-US" sz="1100" dirty="0">
                         <a:latin typeface="Malgun Gothic" charset="0"/>
@@ -1812,7 +1812,7 @@
                           <a:ea typeface="Malgun Gothic" pitchFamily="34" charset="-122"/>
                           <a:cs typeface="Malgun Gothic" pitchFamily="34" charset="-120"/>
                         </a:rPr>
-                        <a:t>Baseline보다 더 악화되지만 크게 늘지는 않은 구간. 상한 30%는 정책 선택 [가정, 확정 필요]</a:t>
+                        <a:t>늘긴 늘지만 크게 늘지는 않은 구간. 상한 30%는 정책 선택 [가정, 확정 필요]</a:t>
                       </a:r>
                       <a:endParaRPr lang="en-US" sz="1100" dirty="0">
                         <a:latin typeface="Malgun Gothic" charset="0"/>
@@ -2018,7 +2018,7 @@
                           <a:ea typeface="Malgun Gothic" pitchFamily="34" charset="-122"/>
                           <a:cs typeface="Malgun Gothic" pitchFamily="34" charset="-120"/>
                         </a:rPr>
-                        <a:t>R &gt; 1.30, 또는 SLO 초과 (TTFT P99 &gt; 2 s 또는 TPOT P99 &gt; 50 ms)</a:t>
+                        <a:t>D &gt; 30%, 또는 SLO 초과 (TTFT P99 &gt; 2 s 또는 TPOT P99 &gt; 50 ms)</a:t>
                       </a:r>
                       <a:endParaRPr lang="en-US" sz="1100" dirty="0">
                         <a:latin typeface="Malgun Gothic" charset="0"/>
@@ -2086,7 +2086,7 @@
                           <a:ea typeface="Malgun Gothic" pitchFamily="34" charset="-122"/>
                           <a:cs typeface="Malgun Gothic" pitchFamily="34" charset="-120"/>
                         </a:rPr>
-                        <a:t>부하 악화 폭이 Baseline보다 30% 넘게 커짐. SLO 초과는 R과 무관하게 ★로 강등</a:t>
+                        <a:t>일반 부하 대비 30% 넘게 악화. SLO 초과는 D와 무관하게 ★로 강등</a:t>
                       </a:r>
                       <a:endParaRPr lang="en-US" sz="1100" dirty="0">
                         <a:latin typeface="Malgun Gothic" charset="0"/>
@@ -3097,7 +3097,7 @@
                 <a:ea typeface="Malgun Gothic" pitchFamily="34" charset="-122"/>
                 <a:cs typeface="Malgun Gothic" pitchFamily="34" charset="-120"/>
               </a:rPr>
-              <a:t>고부하·평균 ΔT의 의미</a:t>
+              <a:t>고부하·D의 의미</a:t>
             </a:r>
             <a:endParaRPr lang="en-US" sz="1300" dirty="0"/>
           </a:p>
@@ -3140,7 +3140,7 @@
                 <a:ea typeface="Malgun Gothic" pitchFamily="34" charset="-122"/>
                 <a:cs typeface="Malgun Gothic" pitchFamily="34" charset="-120"/>
               </a:rPr>
-              <a:t>저부하 = knee 아래(Baseline Max SLO Goodput 부하의 약 30%), 고부하 = 그 knee 부근 이상. 후보와 Baseline을 같은 절대 부하(또는 같은 동시성)에서 잼 [저/고부하 점은 가정]</a:t>
+              <a:t>일반 부하 = knee 아래의 낮은 부하, 고부하 = 동시 세션 수·컨텍스트 길이를 늘려 메모리·이동 압박을 키운 상태(연산 포화 전). 두 점의 workload mix는 같게 유지 [부하 점은 가정]</a:t>
             </a:r>
             <a:endParaRPr lang="en-US" sz="1100" dirty="0"/>
           </a:p>
@@ -3161,7 +3161,7 @@
                 <a:ea typeface="Malgun Gothic" pitchFamily="34" charset="-122"/>
                 <a:cs typeface="Malgun Gothic" pitchFamily="34" charset="-120"/>
               </a:rPr>
-              <a:t>각 시스템의 자기 기준 악화 폭(ΔT)을 비교해, 후보의 저부하 고정 효과와 부하로 증폭되는 overhead를 분리. 비율 ΔT ÷ T(저부하)는 저부하 값이 작은 후보에 불리해 보조로만 병기</a:t>
+              <a:t>용량 포화로 생기는 queueing 대기는 설계 overhead와 섞이므로 고부하는 포화 전으로 제한. As-Is 구조(Baseline)가 같은 측정에서 얻는 D는 별에 쓰지 않고 참고값으로 병기</a:t>
             </a:r>
             <a:endParaRPr lang="en-US" sz="1100" dirty="0"/>
           </a:p>
@@ -3182,7 +3182,7 @@
                 <a:ea typeface="Malgun Gothic" pitchFamily="34" charset="-122"/>
                 <a:cs typeface="Malgun Gothic" pitchFamily="34" charset="-120"/>
               </a:rPr>
-              <a:t>별은 평균으로 판정하고 P99는 SLO 가드로만 사용. 고부하 절대값을 함께 보고하고, ΔT_Baseline이 측정 노이즈 이하이면 R 대신 ΔT(ms)로 보고. Baseline이 SLO를 넘는 점은 infeasible로 표시</a:t>
+              <a:t>별은 평균으로 판정하고 P99는 SLO 가드로만 사용. As-Is가 SLO를 넘는 점은 infeasible로 표시</a:t>
             </a:r>
             <a:endParaRPr lang="en-US" sz="1100" dirty="0"/>
           </a:p>
@@ -3221,7 +3221,7 @@
                 <a:ea typeface="Malgun Gothic" pitchFamily="34" charset="-122"/>
                 <a:cs typeface="Malgun Gothic" pitchFamily="34" charset="-120"/>
               </a:rPr>
-              <a:t>출처: 공통 QA 문서 §5 · MLPerf Inference v5.1 요약(marktechpost, it-online) [2차] · Brysbaert 2019 · tools/unified_stars.py   (★★★ 1.10, ★★ 1.30, 저/고부하 점 = [가정])</a:t>
+              <a:t>출처: 공통 QA 문서 §5 · MLPerf Inference v5.1 요약(marktechpost, it-online) [2차] · Brysbaert 2019 · tools/unified_stars.py   (★★★ 10%, ★★ 30%, 일반/고부하 점 = [가정])</a:t>
             </a:r>
             <a:endParaRPr lang="en-US" sz="900" dirty="0"/>
           </a:p>

--- a/doc-mk/Evaluation/qa2-latency-overhead-criteria.pptx
+++ b/doc-mk/Evaluation/qa2-latency-overhead-criteria.pptx
@@ -947,7 +947,7 @@
                 <a:ea typeface="Malgun Gothic" pitchFamily="34" charset="-122"/>
                 <a:cs typeface="Malgun Gothic" pitchFamily="34" charset="-120"/>
               </a:rPr>
-              <a:t>부하가 커질 때 지연시간(TTFT, TPOT 평균)이 일반 부하 대비 크게 늘지 않아야 함 (단, SLO를 넘으면 ★로 강등)</a:t>
+              <a:t>활성 decode·컨텍스트가 같을 때 대기 세션이 늘어도 TTFT가 일반 부하 대비 크게 늘지 않아야 함 (단, SLO 초과 시 ★)</a:t>
             </a:r>
             <a:endParaRPr lang="en-US" sz="1400" dirty="0"/>
           </a:p>
@@ -1059,7 +1059,7 @@
                 <a:ea typeface="Malgun Gothic" pitchFamily="34" charset="-122"/>
                 <a:cs typeface="Malgun Gothic" pitchFamily="34" charset="-120"/>
               </a:rPr>
-              <a:t>[Metric] D = max [ (TTFT_고부하 − TTFT_일반) ÷ TTFT_일반 , (TPOT_고부하 − TPOT_일반) ÷ TPOT_일반 ]</a:t>
+              <a:t>[Metric] D = (TTFT_고부하 − TTFT_일반) ÷ TTFT_일반</a:t>
             </a:r>
             <a:endParaRPr lang="en-US" sz="1300" dirty="0"/>
           </a:p>
@@ -1076,7 +1076,7 @@
                 <a:ea typeface="Malgun Gothic" pitchFamily="34" charset="-122"/>
                 <a:cs typeface="Malgun Gothic" pitchFamily="34" charset="-120"/>
               </a:rPr>
-              <a:t>평균 기준, 후보 자신의 일반 부하 대비 증가율. D = 0이면 부하가 커져도 지연 불변, 작을수록 고부하 overhead가 적음</a:t>
+              <a:t>TTFT 평균, 후보 자신의 일반 부하 대비 증가율. 두 부하에서 같은 probe 세션을 짝지어 비교. 작을수록 overhead 적음. TPOT 증가율은 보고만</a:t>
             </a:r>
             <a:endParaRPr lang="en-US" sz="1300" dirty="0"/>
           </a:p>
@@ -1538,7 +1538,7 @@
                           <a:ea typeface="Malgun Gothic" pitchFamily="34" charset="-122"/>
                           <a:cs typeface="Malgun Gothic" pitchFamily="34" charset="-120"/>
                         </a:rPr>
-                        <a:t>고부하에서도 지연이 일반 부하 대비 10% 이내 = 메모리·이동 압박에서도 overhead가 거의 없음. seed ≥ 5의 기하평균으로 판정 [10%는 가정]</a:t>
+                        <a:t>대기 세션이 늘어도 TTFT가 일반 부하 대비 10% 이내 = KV 축출·복원, tier 이동, prefix 적중 실패 overhead가 거의 없음. seed ≥ 5의 기하평균으로 판정 [10%는 가정]</a:t>
                       </a:r>
                       <a:endParaRPr lang="en-US" sz="1100" dirty="0">
                         <a:latin typeface="Malgun Gothic" charset="0"/>
@@ -2872,7 +2872,7 @@
                           <a:ea typeface="Malgun Gothic" pitchFamily="34" charset="-122"/>
                           <a:cs typeface="Malgun Gothic" pitchFamily="34" charset="-120"/>
                         </a:rPr>
-                        <a:t>토큰 사이 생성 간격. 스트리밍 응답의 체감 속도이고 총 지연시간에 큰 영향을 줌</a:t>
+                        <a:t>토큰 사이 생성 간격. 스트리밍 응답의 체감 속도. 별에는 쓰지 않고 SLO 가드와 증가율 보고만 함</a:t>
                       </a:r>
                       <a:endParaRPr lang="en-US" sz="1100" dirty="0">
                         <a:latin typeface="Malgun Gothic" charset="0"/>
@@ -3140,7 +3140,7 @@
                 <a:ea typeface="Malgun Gothic" pitchFamily="34" charset="-122"/>
                 <a:cs typeface="Malgun Gothic" pitchFamily="34" charset="-120"/>
               </a:rPr>
-              <a:t>일반 부하 = knee 아래의 낮은 부하, 고부하 = 동시 세션 수·컨텍스트 길이를 늘려 메모리·이동 압박을 키운 상태(연산 포화 전). 두 점의 workload mix는 같게 유지 [부하 점은 가정]</a:t>
+              <a:t>고정 조건: 일반·고부하에서 활성 decode batch 수, 컨텍스트 길이, 도착률, workload mix를 같게 유지. 고부하는 메모리에 올라 있는 대기 세션 수만 늘려 만듦(연산 포화 전). batch·컨텍스트가 커지면 KV read가 늘어 TPOT이 설계와 무관하게 증가하기 때문 [부하 점은 가정]</a:t>
             </a:r>
             <a:endParaRPr lang="en-US" sz="1100" dirty="0"/>
           </a:p>
@@ -3161,7 +3161,7 @@
                 <a:ea typeface="Malgun Gothic" pitchFamily="34" charset="-122"/>
                 <a:cs typeface="Malgun Gothic" pitchFamily="34" charset="-120"/>
               </a:rPr>
-              <a:t>용량 포화로 생기는 queueing 대기는 설계 overhead와 섞이므로 고부하는 포화 전으로 제한. As-Is 구조(Baseline)가 같은 측정에서 얻는 D는 별에 쓰지 않고 참고값으로 병기</a:t>
+              <a:t>진단(별에 불포함): KV 복원 latency P99, step당 stall, 토큰 단위 prefix hit rate 변화, TPOT 평균 증가율. As-Is(Baseline)의 D도 참고값으로 병기</a:t>
             </a:r>
             <a:endParaRPr lang="en-US" sz="1100" dirty="0"/>
           </a:p>
@@ -3182,7 +3182,7 @@
                 <a:ea typeface="Malgun Gothic" pitchFamily="34" charset="-122"/>
                 <a:cs typeface="Malgun Gothic" pitchFamily="34" charset="-120"/>
               </a:rPr>
-              <a:t>별은 평균으로 판정하고 P99는 SLO 가드로만 사용. As-Is가 SLO를 넘는 점은 infeasible로 표시</a:t>
+              <a:t>별은 TTFT 평균 D로 판정, P99는 SLO 가드. admission control로 D를 낮추는 것을 막기 위해 거부·타임아웃 비율을 함께 보고. As-Is가 SLO를 넘는 점은 infeasible로 표시</a:t>
             </a:r>
             <a:endParaRPr lang="en-US" sz="1100" dirty="0"/>
           </a:p>

--- a/doc-mk/Evaluation/qa2-latency-overhead-criteria.pptx
+++ b/doc-mk/Evaluation/qa2-latency-overhead-criteria.pptx
@@ -947,7 +947,7 @@
                 <a:ea typeface="Malgun Gothic" pitchFamily="34" charset="-122"/>
                 <a:cs typeface="Malgun Gothic" pitchFamily="34" charset="-120"/>
               </a:rPr>
-              <a:t>활성 decode·컨텍스트가 같을 때 대기 세션이 늘어도 TTFT가 일반 부하 대비 크게 늘지 않아야 함 (단, SLO 초과 시 ★)</a:t>
+              <a:t>활성 decode·컨텍스트가 같을 때 대기 세션이 늘어도 TTFT·TPOT가 일반 부하 대비 크게 늘지 않아야 함 (단, SLO 초과 시 ★)</a:t>
             </a:r>
             <a:endParaRPr lang="en-US" sz="1400" dirty="0"/>
           </a:p>
@@ -1059,7 +1059,7 @@
                 <a:ea typeface="Malgun Gothic" pitchFamily="34" charset="-122"/>
                 <a:cs typeface="Malgun Gothic" pitchFamily="34" charset="-120"/>
               </a:rPr>
-              <a:t>[Metric] D = (TTFT_고부하 − TTFT_일반) ÷ TTFT_일반</a:t>
+              <a:t>[Metric] D = max [ (TTFT_고부하 − TTFT_일반) ÷ TTFT_일반 , (TPOT_고부하 − TPOT_일반) ÷ TPOT_일반 ]</a:t>
             </a:r>
             <a:endParaRPr lang="en-US" sz="1300" dirty="0"/>
           </a:p>
@@ -1076,7 +1076,7 @@
                 <a:ea typeface="Malgun Gothic" pitchFamily="34" charset="-122"/>
                 <a:cs typeface="Malgun Gothic" pitchFamily="34" charset="-120"/>
               </a:rPr>
-              <a:t>TTFT 평균, 후보 자신의 일반 부하 대비 증가율. 두 부하에서 같은 probe 세션을 짝지어 비교. 작을수록 overhead 적음. TPOT 증가율은 보고만</a:t>
+              <a:t>TTFT·TPOT 평균, 후보 자신의 일반 부하 대비 증가율. 두 부하에서 같은 probe 세션을 짝지어 비교. 작을수록 overhead 적음</a:t>
             </a:r>
             <a:endParaRPr lang="en-US" sz="1300" dirty="0"/>
           </a:p>
@@ -1538,7 +1538,7 @@
                           <a:ea typeface="Malgun Gothic" pitchFamily="34" charset="-122"/>
                           <a:cs typeface="Malgun Gothic" pitchFamily="34" charset="-120"/>
                         </a:rPr>
-                        <a:t>대기 세션이 늘어도 TTFT가 일반 부하 대비 10% 이내 = KV 축출·복원, tier 이동, prefix 적중 실패 overhead가 거의 없음. seed ≥ 5의 기하평균으로 판정 [10%는 가정]</a:t>
+                        <a:t>대기 세션이 늘어도 TTFT·TPOT이 일반 부하 대비 10% 이내 = KV 축출·복원, tier 이동, prefix 적중 실패 overhead가 거의 없음. seed ≥ 5의 기하평균으로 판정 [10%는 가정]</a:t>
                       </a:r>
                       <a:endParaRPr lang="en-US" sz="1100" dirty="0">
                         <a:latin typeface="Malgun Gothic" charset="0"/>
@@ -2872,7 +2872,7 @@
                           <a:ea typeface="Malgun Gothic" pitchFamily="34" charset="-122"/>
                           <a:cs typeface="Malgun Gothic" pitchFamily="34" charset="-120"/>
                         </a:rPr>
-                        <a:t>토큰 사이 생성 간격. 스트리밍 응답의 체감 속도. 별에는 쓰지 않고 SLO 가드와 증가율 보고만 함</a:t>
+                        <a:t>토큰 사이 생성 간격. 스트리밍 응답의 체감 속도이고 총 지연시간에 큰 영향을 줌</a:t>
                       </a:r>
                       <a:endParaRPr lang="en-US" sz="1100" dirty="0">
                         <a:latin typeface="Malgun Gothic" charset="0"/>
@@ -3140,7 +3140,7 @@
                 <a:ea typeface="Malgun Gothic" pitchFamily="34" charset="-122"/>
                 <a:cs typeface="Malgun Gothic" pitchFamily="34" charset="-120"/>
               </a:rPr>
-              <a:t>고정 조건: 일반·고부하에서 활성 decode batch 수, 컨텍스트 길이, 도착률, workload mix를 같게 유지. 고부하는 메모리에 올라 있는 대기 세션 수만 늘려 만듦(연산 포화 전). batch·컨텍스트가 커지면 KV read가 늘어 TPOT이 설계와 무관하게 증가하기 때문 [부하 점은 가정]</a:t>
+              <a:t>고정 조건: 일반·고부하에서 활성 decode batch 수, 컨텍스트 길이, 도착률, workload mix를 같게 유지. 고부하는 메모리에 올라 있는 대기 세션 수만 늘려 만듦(연산 포화 전). batch·컨텍스트가 커지면 KV read가 늘어 TPOT이 설계와 무관하게 증가하므로, 고정해야 TPOT D에 설계 영향만 남음 [부하 점은 가정]</a:t>
             </a:r>
             <a:endParaRPr lang="en-US" sz="1100" dirty="0"/>
           </a:p>
@@ -3161,7 +3161,7 @@
                 <a:ea typeface="Malgun Gothic" pitchFamily="34" charset="-122"/>
                 <a:cs typeface="Malgun Gothic" pitchFamily="34" charset="-120"/>
               </a:rPr>
-              <a:t>진단(별에 불포함): KV 복원 latency P99, step당 stall, 토큰 단위 prefix hit rate 변화, TPOT 평균 증가율. As-Is(Baseline)의 D도 참고값으로 병기</a:t>
+              <a:t>진단(별에 불포함): KV 복원 latency P99, step당 stall, 토큰 단위 prefix hit rate 변화, tier별 KV 읽기 시간. As-Is(Baseline)의 D도 참고값으로 병기</a:t>
             </a:r>
             <a:endParaRPr lang="en-US" sz="1100" dirty="0"/>
           </a:p>
@@ -3182,7 +3182,7 @@
                 <a:ea typeface="Malgun Gothic" pitchFamily="34" charset="-122"/>
                 <a:cs typeface="Malgun Gothic" pitchFamily="34" charset="-120"/>
               </a:rPr>
-              <a:t>별은 TTFT 평균 D로 판정, P99는 SLO 가드. admission control로 D를 낮추는 것을 막기 위해 거부·타임아웃 비율을 함께 보고. As-Is가 SLO를 넘는 점은 infeasible로 표시</a:t>
+              <a:t>별은 TTFT·TPOT 평균 중 나쁜 쪽 D로 판정, P99는 SLO 가드. admission control로 D를 낮추는 것을 막기 위해 거부·타임아웃 비율을 함께 보고. As-Is가 SLO를 넘는 점은 infeasible로 표시</a:t>
             </a:r>
             <a:endParaRPr lang="en-US" sz="1100" dirty="0"/>
           </a:p>
